--- a/QM_Pulse_Executive_Presentation.pptx
+++ b/QM_Pulse_Executive_Presentation.pptx
@@ -515,12 +515,12 @@
           </a:p>
           <a:p>
             <a:r>
-              <a:t>"Good morning, Executive Leadership. Today, I am proud to present QMPulse—our unified Quality Management platform.</a:t>
-            </a:r>
-          </a:p>
-          <a:p>
-            <a:r>
-              <a:t>In software and product delivery, quality cannot simply be an afterthought or an isolated QA phase before release. QMPulse connects the entire delivery chain: from the very first business requirement authored by Functional Analysts, through sprint build, QA test execution, and real-time PMO governance, straight to final go-live sign-off. It gives leadership 100% end-to-end visibility, guarantees compliance, eliminates spreadsheet chaos, and accelerates testing with built-in AI."</a:t>
+              <a:t>"Good morning, Executive Leadership. Today, I am proud to present QM Pulse—our unified Quality Management platform.</a:t>
+            </a:r>
+          </a:p>
+          <a:p>
+            <a:r>
+              <a:t>In software and product delivery, quality cannot simply be an afterthought or an isolated QA phase before release. QM Pulse connects the entire delivery chain: from the very first business requirement authored by Functional Analysts, through sprint build, QA test execution, and real-time PMO governance, straight to final go-live sign-off. It gives leadership 100% end-to-end visibility, guarantees compliance, eliminates spreadsheet chaos, and accelerates testing with built-in AI."</a:t>
             </a:r>
           </a:p>
         </p:txBody>
@@ -595,7 +595,7 @@
           </a:p>
           <a:p>
             <a:r>
-              <a:t>"To understand why QMPulse is vital, let us look at the industry's common bottleneck: tool sprawl.</a:t>
+              <a:t>"To understand why QM Pulse is vital, let us look at the industry's common bottleneck: tool sprawl.</a:t>
             </a:r>
           </a:p>
           <a:p>
@@ -605,7 +605,7 @@
           </a:p>
           <a:p>
             <a:r>
-              <a:t>QMPulse solves this by establishing one single operational pulse. We are not discarding Redmine—we are supercharging it with automated workflows, AI assistance, and instant executive analytics. Everything is transparent, tracked, and verifiable."</a:t>
+              <a:t>QM Pulse solves this by establishing one single operational pulse. We are not discarding Redmine—we are supercharging it with automated workflows, AI assistance, and instant executive analytics. Everything is transparent, tracked, and verifiable."</a:t>
             </a:r>
           </a:p>
         </p:txBody>
@@ -680,7 +680,7 @@
           </a:p>
           <a:p>
             <a:r>
-              <a:t>"Here is how QMPulse serves every single leader in this room:</a:t>
+              <a:t>"Here is how QM Pulse serves every single leader in this room:</a:t>
             </a:r>
           </a:p>
           <a:p>
@@ -780,7 +780,7 @@
           </a:p>
           <a:p>
             <a:r>
-              <a:t>"This 8-stage lifecycle is the core engine of QMPulse. </a:t>
+              <a:t>"This 8-stage lifecycle is the core engine of QM Pulse. </a:t>
             </a:r>
           </a:p>
           <a:p>
@@ -880,12 +880,12 @@
           </a:p>
           <a:p>
             <a:r>
-              <a:t>"Two strategic technological pillars set QMPulse apart:</a:t>
-            </a:r>
-          </a:p>
-          <a:p>
-            <a:r>
-              <a:t>1. We integrate seamlessly with Redmine. Many platforms force you to migrate data or rip out existing tracking. QMPulse acts as a modern quality layer over Redmine, synchronizing in real time without overwriting history.</a:t>
+              <a:t>"Two strategic technological pillars set QM Pulse apart:</a:t>
+            </a:r>
+          </a:p>
+          <a:p>
+            <a:r>
+              <a:t>1. We integrate seamlessly with Redmine. Many platforms force you to migrate data or rip out existing tracking. QM Pulse acts as a modern quality layer over Redmine, synchronizing in real time without overwriting history.</a:t>
             </a:r>
           </a:p>
           <a:p>
@@ -965,7 +965,7 @@
           </a:p>
           <a:p>
             <a:r>
-              <a:t>"This slide demonstrates the complete depth of QMPulse across 4 disciplines and 12 core modules. </a:t>
+              <a:t>"This slide demonstrates the complete depth of QM Pulse across 4 disciplines and 12 core modules. </a:t>
             </a:r>
           </a:p>
           <a:p>
@@ -1050,7 +1050,7 @@
           </a:p>
           <a:p>
             <a:r>
-              <a:t>- Security &amp; Access: QMPulse enforces 15 granular roles. PMO members get an executive portal; FAs and QA get specialized workspaces.</a:t>
+              <a:t>- Security &amp; Access: QM Pulse enforces 15 granular roles. PMO members get an executive portal; FAs and QA get specialized workspaces.</a:t>
             </a:r>
           </a:p>
           <a:p>
@@ -4422,7 +4422,7 @@
               </a:defRPr>
             </a:pPr>
             <a:r>
-              <a:t>QMPulse (Quality Management Pulse)</a:t>
+              <a:t>QM Pulse (Quality Management Pulse)</a:t>
             </a:r>
           </a:p>
           <a:p>
@@ -5031,7 +5031,7 @@
               </a:defRPr>
             </a:pPr>
             <a:r>
-              <a:t>Why traditional enterprise delivery breaks down—and how QMPulse fixes it.</a:t>
+              <a:t>Why traditional enterprise delivery breaks down—and how QM Pulse fixes it.</a:t>
             </a:r>
           </a:p>
         </p:txBody>
@@ -5369,7 +5369,7 @@
               </a:defRPr>
             </a:pPr>
             <a:r>
-              <a:t>THE QMPULSE SOLUTION</a:t>
+              <a:t>THE QM PULSE SOLUTION</a:t>
             </a:r>
           </a:p>
         </p:txBody>
@@ -8539,7 +8539,7 @@
               </a:defRPr>
             </a:pPr>
             <a:r>
-              <a:t>QMPulse leverages your existing Redmine installation—no costly data migrations or team re-training required.</a:t>
+              <a:t>QM Pulse leverages your existing Redmine installation—no costly data migrations or team re-training required.</a:t>
             </a:r>
           </a:p>
           <a:p>
@@ -12068,7 +12068,7 @@
               </a:defRPr>
             </a:pPr>
             <a:r>
-              <a:t>QMPulse is fully built, integrated, and ready to deploy. We invite executive leadership to approve the Phase 1 Pilot rollout starting this week.</a:t>
+              <a:t>QM Pulse is fully built, integrated, and ready to deploy. We invite executive leadership to approve the Phase 1 Pilot rollout starting this week.</a:t>
             </a:r>
             <a:br/>
             <a:br/>
